--- a/kpi-app/backend/templates/marketing_hub_deck.pptx
+++ b/kpi-app/backend/templates/marketing_hub_deck.pptx
@@ -10313,7 +10313,7 @@
                 <a:ea typeface="Inter" pitchFamily="34" charset="-122"/>
                 <a:cs typeface="Inter" pitchFamily="34" charset="-120"/>
               </a:rPr>
-              <a:t>Pooja</a:t>
+              <a:t>{{lb_name_1}}</a:t>
             </a:r>
             <a:endParaRPr lang="en-US" sz="975" dirty="0"/>
           </a:p>
@@ -10411,7 +10411,7 @@
                 <a:ea typeface="Inter" pitchFamily="34" charset="-122"/>
                 <a:cs typeface="Inter" pitchFamily="34" charset="-120"/>
               </a:rPr>
-              <a:t>{{count_pooja}}</a:t>
+              <a:t>{{lb_count_1}}</a:t>
             </a:r>
             <a:endParaRPr lang="en-US" sz="975" dirty="0"/>
           </a:p>
@@ -10455,7 +10455,7 @@
                 <a:ea typeface="Inter" pitchFamily="34" charset="-122"/>
                 <a:cs typeface="Inter" pitchFamily="34" charset="-120"/>
               </a:rPr>
-              <a:t>Akshayaa R</a:t>
+              <a:t>{{lb_name_2}}</a:t>
             </a:r>
             <a:endParaRPr lang="en-US" sz="975" dirty="0"/>
           </a:p>
@@ -10553,7 +10553,7 @@
                 <a:ea typeface="Inter" pitchFamily="34" charset="-122"/>
                 <a:cs typeface="Inter" pitchFamily="34" charset="-120"/>
               </a:rPr>
-              <a:t>{{count_akshayaar}}</a:t>
+              <a:t>{{lb_count_2}}</a:t>
             </a:r>
             <a:endParaRPr lang="en-US" sz="975" dirty="0"/>
           </a:p>
@@ -10597,7 +10597,7 @@
                 <a:ea typeface="Inter" pitchFamily="34" charset="-122"/>
                 <a:cs typeface="Inter" pitchFamily="34" charset="-120"/>
               </a:rPr>
-              <a:t>Arvind</a:t>
+              <a:t>{{lb_name_3}}</a:t>
             </a:r>
             <a:endParaRPr lang="en-US" sz="975" dirty="0"/>
           </a:p>
@@ -10695,7 +10695,7 @@
                 <a:ea typeface="Inter" pitchFamily="34" charset="-122"/>
                 <a:cs typeface="Inter" pitchFamily="34" charset="-120"/>
               </a:rPr>
-              <a:t>{{count_arvind}}</a:t>
+              <a:t>{{lb_count_3}}</a:t>
             </a:r>
             <a:endParaRPr lang="en-US" sz="975" dirty="0"/>
           </a:p>
@@ -10739,7 +10739,7 @@
                 <a:ea typeface="Inter" pitchFamily="34" charset="-122"/>
                 <a:cs typeface="Inter" pitchFamily="34" charset="-120"/>
               </a:rPr>
-              <a:t>Ajith</a:t>
+              <a:t>{{lb_name_4}}</a:t>
             </a:r>
             <a:endParaRPr lang="en-US" sz="975" dirty="0"/>
           </a:p>
@@ -10837,7 +10837,7 @@
                 <a:ea typeface="Inter" pitchFamily="34" charset="-122"/>
                 <a:cs typeface="Inter" pitchFamily="34" charset="-120"/>
               </a:rPr>
-              <a:t>{{count_ajith}}</a:t>
+              <a:t>{{lb_count_4}}</a:t>
             </a:r>
             <a:endParaRPr lang="en-US" sz="975" dirty="0"/>
           </a:p>
@@ -10881,7 +10881,7 @@
                 <a:ea typeface="Inter" pitchFamily="34" charset="-122"/>
                 <a:cs typeface="Inter" pitchFamily="34" charset="-120"/>
               </a:rPr>
-              <a:t>Akshaya P</a:t>
+              <a:t>{{lb_name_5}}</a:t>
             </a:r>
             <a:endParaRPr lang="en-US" sz="975" dirty="0"/>
           </a:p>
@@ -10979,7 +10979,7 @@
                 <a:ea typeface="Inter" pitchFamily="34" charset="-122"/>
                 <a:cs typeface="Inter" pitchFamily="34" charset="-120"/>
               </a:rPr>
-              <a:t>{{count_akshayap}}</a:t>
+              <a:t>{{lb_count_5}}</a:t>
             </a:r>
             <a:endParaRPr lang="en-US" sz="975" dirty="0"/>
           </a:p>
@@ -11023,7 +11023,7 @@
                 <a:ea typeface="Inter" pitchFamily="34" charset="-122"/>
                 <a:cs typeface="Inter" pitchFamily="34" charset="-120"/>
               </a:rPr>
-              <a:t>Ranjith</a:t>
+              <a:t>{{lb_name_6}}</a:t>
             </a:r>
             <a:endParaRPr lang="en-US" sz="975" dirty="0"/>
           </a:p>
@@ -11121,149 +11121,7 @@
                 <a:ea typeface="Inter" pitchFamily="34" charset="-122"/>
                 <a:cs typeface="Inter" pitchFamily="34" charset="-120"/>
               </a:rPr>
-              <a:t>{{count_ranjith}}</a:t>
-            </a:r>
-            <a:endParaRPr lang="en-US" sz="975" dirty="0"/>
-          </a:p>
-        </p:txBody>
-      </p:sp>
-      <p:sp>
-        <p:nvSpPr>
-          <p:cNvPr id="47" name="Text 44"/>
-          <p:cNvSpPr/>
-          <p:nvPr/>
-        </p:nvSpPr>
-        <p:spPr>
-          <a:xfrm>
-            <a:off x="7858125" y="3990975"/>
-            <a:ext cx="914400" cy="223838"/>
-          </a:xfrm>
-          <a:prstGeom prst="rect">
-            <a:avLst/>
-          </a:prstGeom>
-          <a:noFill/>
-          <a:ln/>
-        </p:spPr>
-        <p:txBody>
-          <a:bodyPr wrap="square" lIns="25400" tIns="25400" rIns="25400" bIns="25400" rtlCol="0" anchor="t">
-            <a:normAutofit/>
-          </a:bodyPr>
-          <a:lstStyle/>
-          <a:p>
-            <a:pPr marL="0" indent="0" algn="l">
-              <a:lnSpc>
-                <a:spcPct val="121875"/>
-              </a:lnSpc>
-              <a:buNone/>
-            </a:pPr>
-            <a:r>
-              <a:rPr lang="en-US" sz="975" dirty="0">
-                <a:solidFill>
-                  <a:srgbClr val="141414"/>
-                </a:solidFill>
-                <a:latin typeface="Inter" pitchFamily="34" charset="0"/>
-                <a:ea typeface="Inter" pitchFamily="34" charset="-122"/>
-                <a:cs typeface="Inter" pitchFamily="34" charset="-120"/>
-              </a:rPr>
-              <a:t>Nitish</a:t>
-            </a:r>
-            <a:endParaRPr lang="en-US" sz="975" dirty="0"/>
-          </a:p>
-        </p:txBody>
-      </p:sp>
-      <p:sp>
-        <p:nvSpPr>
-          <p:cNvPr id="48" name="Shape 45"/>
-          <p:cNvSpPr/>
-          <p:nvPr/>
-        </p:nvSpPr>
-        <p:spPr>
-          <a:xfrm>
-            <a:off x="8810625" y="4012406"/>
-            <a:ext cx="2628900" cy="142875"/>
-          </a:xfrm>
-          <a:prstGeom prst="rect">
-            <a:avLst/>
-          </a:prstGeom>
-          <a:solidFill>
-            <a:srgbClr val="EEF1F5"/>
-          </a:solidFill>
-          <a:ln/>
-        </p:spPr>
-        <p:txBody>
-          <a:bodyPr/>
-          <a:lstStyle/>
-          <a:p>
-            <a:endParaRPr lang="en-US"/>
-          </a:p>
-        </p:txBody>
-      </p:sp>
-      <p:sp>
-        <p:nvSpPr>
-          <p:cNvPr id="49" name="Shape 46"/>
-          <p:cNvSpPr/>
-          <p:nvPr/>
-        </p:nvSpPr>
-        <p:spPr>
-          <a:xfrm>
-            <a:off x="8810625" y="4012406"/>
-            <a:ext cx="110371" cy="142875"/>
-          </a:xfrm>
-          <a:prstGeom prst="rect">
-            <a:avLst/>
-          </a:prstGeom>
-          <a:solidFill>
-            <a:srgbClr val="1450F5"/>
-          </a:solidFill>
-          <a:ln/>
-        </p:spPr>
-        <p:txBody>
-          <a:bodyPr/>
-          <a:lstStyle/>
-          <a:p>
-            <a:endParaRPr lang="en-US"/>
-          </a:p>
-        </p:txBody>
-      </p:sp>
-      <p:sp>
-        <p:nvSpPr>
-          <p:cNvPr id="50" name="Text 47"/>
-          <p:cNvSpPr/>
-          <p:nvPr/>
-        </p:nvSpPr>
-        <p:spPr>
-          <a:xfrm>
-            <a:off x="11477625" y="3990975"/>
-            <a:ext cx="285750" cy="223838"/>
-          </a:xfrm>
-          <a:prstGeom prst="rect">
-            <a:avLst/>
-          </a:prstGeom>
-          <a:noFill/>
-          <a:ln/>
-        </p:spPr>
-        <p:txBody>
-          <a:bodyPr wrap="square" lIns="25400" tIns="25400" rIns="25400" bIns="25400" rtlCol="0" anchor="t">
-            <a:normAutofit/>
-          </a:bodyPr>
-          <a:lstStyle/>
-          <a:p>
-            <a:pPr marL="0" indent="0" algn="r">
-              <a:lnSpc>
-                <a:spcPct val="121875"/>
-              </a:lnSpc>
-              <a:buNone/>
-            </a:pPr>
-            <a:r>
-              <a:rPr lang="en-US" sz="975" b="1" dirty="0">
-                <a:solidFill>
-                  <a:srgbClr val="141414"/>
-                </a:solidFill>
-                <a:latin typeface="Inter" pitchFamily="34" charset="0"/>
-                <a:ea typeface="Inter" pitchFamily="34" charset="-122"/>
-                <a:cs typeface="Inter" pitchFamily="34" charset="-120"/>
-              </a:rPr>
-              <a:t>{{count_nitish}}</a:t>
+              <a:t>{{lb_count_6}}</a:t>
             </a:r>
             <a:endParaRPr lang="en-US" sz="975" dirty="0"/>
           </a:p>

--- a/kpi-app/backend/templates/marketing_hub_deck.pptx
+++ b/kpi-app/backend/templates/marketing_hub_deck.pptx
@@ -6789,7 +6789,7 @@
                 <a:ea typeface="Inter SemiBold" panose="02000503000000020004" pitchFamily="2" charset="0"/>
                 <a:cs typeface="Inter" pitchFamily="34" charset="-120"/>
               </a:rPr>
-              <a:t>[Story 1 title]</a:t>
+              <a:t>{{story_1_title}}</a:t>
             </a:r>
             <a:endParaRPr lang="en-US" sz="1425" dirty="0">
               <a:latin typeface="Inter SemiBold" panose="02000503000000020004" pitchFamily="2" charset="0"/>
@@ -6836,7 +6836,7 @@
                 <a:ea typeface="Inter" pitchFamily="34" charset="-122"/>
                 <a:cs typeface="Inter" pitchFamily="34" charset="-120"/>
               </a:rPr>
-              <a:t>[2-3 sentences on what was delivered and why it mattered]</a:t>
+              <a:t>{{story_1_body}}</a:t>
             </a:r>
             <a:endParaRPr lang="en-US" sz="1088" dirty="0"/>
           </a:p>
@@ -6951,7 +6951,7 @@
                 <a:ea typeface="Inter SemiBold" panose="02000503000000020004" pitchFamily="2" charset="0"/>
                 <a:cs typeface="Inter" pitchFamily="34" charset="-120"/>
               </a:rPr>
-              <a:t>[Story 2 title]</a:t>
+              <a:t>{{story_2_title}}</a:t>
             </a:r>
             <a:endParaRPr lang="en-US" sz="1425" dirty="0">
               <a:latin typeface="Inter SemiBold" panose="02000503000000020004" pitchFamily="2" charset="0"/>
@@ -6998,7 +6998,7 @@
                 <a:ea typeface="Inter" pitchFamily="34" charset="-122"/>
                 <a:cs typeface="Inter" pitchFamily="34" charset="-120"/>
               </a:rPr>
-              <a:t>[2-3 sentences on what was delivered and why it mattered]</a:t>
+              <a:t>{{story_2_body}}</a:t>
             </a:r>
             <a:endParaRPr lang="en-US" sz="1088" dirty="0"/>
           </a:p>
@@ -7113,7 +7113,7 @@
                 <a:ea typeface="Inter SemiBold" panose="02000503000000020004" pitchFamily="2" charset="0"/>
                 <a:cs typeface="Inter" pitchFamily="34" charset="-120"/>
               </a:rPr>
-              <a:t>[Story 3 title]</a:t>
+              <a:t>{{story_3_title}}</a:t>
             </a:r>
             <a:endParaRPr lang="en-US" sz="1425" dirty="0">
               <a:latin typeface="Inter SemiBold" panose="02000503000000020004" pitchFamily="2" charset="0"/>
@@ -7160,7 +7160,7 @@
                 <a:ea typeface="Inter" pitchFamily="34" charset="-122"/>
                 <a:cs typeface="Inter" pitchFamily="34" charset="-120"/>
               </a:rPr>
-              <a:t>[2-3 sentences on what was delivered and why it mattered]</a:t>
+              <a:t>{{story_3_body}}</a:t>
             </a:r>
             <a:endParaRPr lang="en-US" sz="1088" dirty="0"/>
           </a:p>
@@ -11496,7 +11496,7 @@
                 <a:ea typeface="Inter" pitchFamily="34" charset="-122"/>
                 <a:cs typeface="Inter" pitchFamily="34" charset="-120"/>
               </a:rPr>
-              <a:t>[Update 1]</a:t>
+              <a:t>{{update_1}}</a:t>
             </a:r>
             <a:endParaRPr lang="en-US" sz="1200" dirty="0"/>
           </a:p>
@@ -11567,7 +11567,7 @@
                 <a:ea typeface="Inter" pitchFamily="34" charset="-122"/>
                 <a:cs typeface="Inter" pitchFamily="34" charset="-120"/>
               </a:rPr>
-              <a:t>[Update 2]</a:t>
+              <a:t>{{update_2}}</a:t>
             </a:r>
             <a:endParaRPr lang="en-US" sz="1200" dirty="0"/>
           </a:p>
@@ -11638,7 +11638,7 @@
                 <a:ea typeface="Inter" pitchFamily="34" charset="-122"/>
                 <a:cs typeface="Inter" pitchFamily="34" charset="-120"/>
               </a:rPr>
-              <a:t>[Update 3]</a:t>
+              <a:t>{{update_3}}</a:t>
             </a:r>
             <a:endParaRPr lang="en-US" sz="1200" dirty="0"/>
           </a:p>
@@ -11709,7 +11709,7 @@
                 <a:ea typeface="Inter" pitchFamily="34" charset="-122"/>
                 <a:cs typeface="Inter" pitchFamily="34" charset="-120"/>
               </a:rPr>
-              <a:t>[Update 4]</a:t>
+              <a:t>{{update_4}}</a:t>
             </a:r>
             <a:endParaRPr lang="en-US" sz="1200" dirty="0"/>
           </a:p>
@@ -11780,7 +11780,7 @@
                 <a:ea typeface="Inter" pitchFamily="34" charset="-122"/>
                 <a:cs typeface="Inter" pitchFamily="34" charset="-120"/>
               </a:rPr>
-              <a:t>[Update 5]</a:t>
+              <a:t>{{update_5}}</a:t>
             </a:r>
             <a:endParaRPr lang="en-US" sz="1200" dirty="0"/>
           </a:p>
@@ -11851,7 +11851,7 @@
                 <a:ea typeface="Inter" pitchFamily="34" charset="-122"/>
                 <a:cs typeface="Inter" pitchFamily="34" charset="-120"/>
               </a:rPr>
-              <a:t>[Update 6]</a:t>
+              <a:t>{{update_6}}</a:t>
             </a:r>
             <a:endParaRPr lang="en-US" sz="1200" dirty="0"/>
           </a:p>
@@ -11995,7 +11995,7 @@
                 <a:ea typeface="Inter" pitchFamily="34" charset="-122"/>
                 <a:cs typeface="Inter" pitchFamily="34" charset="-120"/>
               </a:rPr>
-              <a:t>[Way forward 1]</a:t>
+              <a:t>{{way_forward_1}}</a:t>
             </a:r>
             <a:endParaRPr lang="en-US" sz="1200" dirty="0"/>
           </a:p>
@@ -12068,7 +12068,7 @@
                 <a:ea typeface="Inter" pitchFamily="34" charset="-122"/>
                 <a:cs typeface="Inter" pitchFamily="34" charset="-120"/>
               </a:rPr>
-              <a:t>[Way forward 2]</a:t>
+              <a:t>{{way_forward_2}}</a:t>
             </a:r>
             <a:endParaRPr lang="en-US" sz="1200" dirty="0"/>
           </a:p>
@@ -12141,7 +12141,7 @@
                 <a:ea typeface="Inter" pitchFamily="34" charset="-122"/>
                 <a:cs typeface="Inter" pitchFamily="34" charset="-120"/>
               </a:rPr>
-              <a:t>[Way forward 3]</a:t>
+              <a:t>{{way_forward_3}}</a:t>
             </a:r>
             <a:endParaRPr lang="en-US" sz="1200" dirty="0"/>
           </a:p>
@@ -12214,7 +12214,7 @@
                 <a:ea typeface="Inter" pitchFamily="34" charset="-122"/>
                 <a:cs typeface="Inter" pitchFamily="34" charset="-120"/>
               </a:rPr>
-              <a:t>[Way forward 4]</a:t>
+              <a:t>{{way_forward_4}}</a:t>
             </a:r>
             <a:endParaRPr lang="en-US" sz="1200" dirty="0"/>
           </a:p>
@@ -12287,7 +12287,7 @@
                 <a:ea typeface="Inter" pitchFamily="34" charset="-122"/>
                 <a:cs typeface="Inter" pitchFamily="34" charset="-120"/>
               </a:rPr>
-              <a:t>[Way forward 5]</a:t>
+              <a:t>{{way_forward_5}}</a:t>
             </a:r>
             <a:endParaRPr lang="en-US" sz="1200" dirty="0"/>
           </a:p>

--- a/kpi-app/backend/templates/marketing_hub_deck.pptx
+++ b/kpi-app/backend/templates/marketing_hub_deck.pptx
@@ -7885,7 +7885,7 @@
         <p:spPr>
           <a:xfrm>
             <a:off x="590550" y="2189798"/>
-            <a:ext cx="2249805" cy="373023"/>
+            <a:ext cx="2468047" cy="373023"/>
           </a:xfrm>
           <a:prstGeom prst="rect">
             <a:avLst/>
@@ -7956,7 +7956,7 @@
         <p:spPr>
           <a:xfrm>
             <a:off x="590550" y="2659618"/>
-            <a:ext cx="2292430" cy="373023"/>
+            <a:ext cx="2468047" cy="373023"/>
           </a:xfrm>
           <a:prstGeom prst="rect">
             <a:avLst/>
@@ -7999,7 +7999,7 @@
         </p:nvSpPr>
         <p:spPr>
           <a:xfrm>
-            <a:off x="428625" y="3188494"/>
+            <a:off x="428625" y="3188493"/>
             <a:ext cx="47625" cy="47625"/>
           </a:xfrm>
           <a:prstGeom prst="rect">
@@ -8026,8 +8026,8 @@
         </p:nvSpPr>
         <p:spPr>
           <a:xfrm>
-            <a:off x="590550" y="3129439"/>
-            <a:ext cx="2302669" cy="373023"/>
+            <a:off x="590550" y="3129438"/>
+            <a:ext cx="2468047" cy="373023"/>
           </a:xfrm>
           <a:prstGeom prst="rect">
             <a:avLst/>
@@ -8070,7 +8070,7 @@
         </p:nvSpPr>
         <p:spPr>
           <a:xfrm>
-            <a:off x="428625" y="3658314"/>
+            <a:off x="428625" y="3658313"/>
             <a:ext cx="47625" cy="47625"/>
           </a:xfrm>
           <a:prstGeom prst="rect">
@@ -8097,8 +8097,8 @@
         </p:nvSpPr>
         <p:spPr>
           <a:xfrm>
-            <a:off x="590550" y="3599259"/>
-            <a:ext cx="2400776" cy="190500"/>
+            <a:off x="590550" y="3599258"/>
+            <a:ext cx="2468047" cy="373023"/>
           </a:xfrm>
           <a:prstGeom prst="rect">
             <a:avLst/>
@@ -8141,7 +8141,7 @@
         </p:nvSpPr>
         <p:spPr>
           <a:xfrm>
-            <a:off x="428625" y="3945612"/>
+            <a:off x="428625" y="4128133"/>
             <a:ext cx="47625" cy="47625"/>
           </a:xfrm>
           <a:prstGeom prst="rect">
@@ -8168,7 +8168,7 @@
         </p:nvSpPr>
         <p:spPr>
           <a:xfrm>
-            <a:off x="590550" y="3886557"/>
+            <a:off x="590550" y="4069078"/>
             <a:ext cx="2468047" cy="373023"/>
           </a:xfrm>
           <a:prstGeom prst="rect">
@@ -8212,7 +8212,7 @@
         </p:nvSpPr>
         <p:spPr>
           <a:xfrm>
-            <a:off x="428625" y="4415433"/>
+            <a:off x="428625" y="4597953"/>
             <a:ext cx="47625" cy="47625"/>
           </a:xfrm>
           <a:prstGeom prst="rect">
@@ -8239,8 +8239,8 @@
         </p:nvSpPr>
         <p:spPr>
           <a:xfrm>
-            <a:off x="590550" y="4356378"/>
-            <a:ext cx="2451021" cy="373023"/>
+            <a:off x="590550" y="4538898"/>
+            <a:ext cx="2468047" cy="373023"/>
           </a:xfrm>
           <a:prstGeom prst="rect">
             <a:avLst/>
@@ -8382,7 +8382,7 @@
         <p:spPr>
           <a:xfrm>
             <a:off x="3524250" y="2189798"/>
-            <a:ext cx="1917621" cy="190500"/>
+            <a:ext cx="2561154" cy="373023"/>
           </a:xfrm>
           <a:prstGeom prst="rect">
             <a:avLst/>
@@ -8425,7 +8425,7 @@
         </p:nvSpPr>
         <p:spPr>
           <a:xfrm>
-            <a:off x="3362325" y="2536150"/>
+            <a:off x="3362325" y="2718673"/>
             <a:ext cx="47625" cy="47625"/>
           </a:xfrm>
           <a:prstGeom prst="rect">
@@ -8452,8 +8452,8 @@
         </p:nvSpPr>
         <p:spPr>
           <a:xfrm>
-            <a:off x="3524250" y="2477095"/>
-            <a:ext cx="2561154" cy="190500"/>
+            <a:off x="3524250" y="2659618"/>
+            <a:ext cx="2561154" cy="373023"/>
           </a:xfrm>
           <a:prstGeom prst="rect">
             <a:avLst/>
@@ -8496,7 +8496,7 @@
         </p:nvSpPr>
         <p:spPr>
           <a:xfrm>
-            <a:off x="3362325" y="2823448"/>
+            <a:off x="3362325" y="3188493"/>
             <a:ext cx="47625" cy="47625"/>
           </a:xfrm>
           <a:prstGeom prst="rect">
@@ -8523,8 +8523,8 @@
         </p:nvSpPr>
         <p:spPr>
           <a:xfrm>
-            <a:off x="3524250" y="2764393"/>
-            <a:ext cx="1732359" cy="190500"/>
+            <a:off x="3524250" y="3129438"/>
+            <a:ext cx="2561154" cy="373023"/>
           </a:xfrm>
           <a:prstGeom prst="rect">
             <a:avLst/>
@@ -8567,7 +8567,7 @@
         </p:nvSpPr>
         <p:spPr>
           <a:xfrm>
-            <a:off x="3362325" y="3110746"/>
+            <a:off x="3362325" y="3658313"/>
             <a:ext cx="47625" cy="47625"/>
           </a:xfrm>
           <a:prstGeom prst="rect">
@@ -8594,8 +8594,8 @@
         </p:nvSpPr>
         <p:spPr>
           <a:xfrm>
-            <a:off x="3524250" y="3051691"/>
-            <a:ext cx="2438281" cy="373023"/>
+            <a:off x="3524250" y="3599258"/>
+            <a:ext cx="2561154" cy="373023"/>
           </a:xfrm>
           <a:prstGeom prst="rect">
             <a:avLst/>
@@ -8638,7 +8638,7 @@
         </p:nvSpPr>
         <p:spPr>
           <a:xfrm>
-            <a:off x="3362325" y="3580567"/>
+            <a:off x="3362325" y="4128133"/>
             <a:ext cx="47625" cy="47625"/>
           </a:xfrm>
           <a:prstGeom prst="rect">
@@ -8665,8 +8665,8 @@
         </p:nvSpPr>
         <p:spPr>
           <a:xfrm>
-            <a:off x="3524250" y="3521512"/>
-            <a:ext cx="2366843" cy="190500"/>
+            <a:off x="3524250" y="4069078"/>
+            <a:ext cx="2561154" cy="373023"/>
           </a:xfrm>
           <a:prstGeom prst="rect">
             <a:avLst/>
@@ -8808,7 +8808,7 @@
         <p:spPr>
           <a:xfrm>
             <a:off x="6457950" y="2189798"/>
-            <a:ext cx="1726406" cy="190500"/>
+            <a:ext cx="2433638" cy="373023"/>
           </a:xfrm>
           <a:prstGeom prst="rect">
             <a:avLst/>
@@ -8851,7 +8851,7 @@
         </p:nvSpPr>
         <p:spPr>
           <a:xfrm>
-            <a:off x="6296025" y="2536150"/>
+            <a:off x="6296025" y="2718673"/>
             <a:ext cx="47625" cy="47625"/>
           </a:xfrm>
           <a:prstGeom prst="rect">
@@ -8878,8 +8878,8 @@
         </p:nvSpPr>
         <p:spPr>
           <a:xfrm>
-            <a:off x="6457950" y="2477095"/>
-            <a:ext cx="2228850" cy="190500"/>
+            <a:off x="6457950" y="2659618"/>
+            <a:ext cx="2433638" cy="373023"/>
           </a:xfrm>
           <a:prstGeom prst="rect">
             <a:avLst/>
@@ -8922,7 +8922,7 @@
         </p:nvSpPr>
         <p:spPr>
           <a:xfrm>
-            <a:off x="6296025" y="2823448"/>
+            <a:off x="6296025" y="3188493"/>
             <a:ext cx="47625" cy="47625"/>
           </a:xfrm>
           <a:prstGeom prst="rect">
@@ -8949,8 +8949,8 @@
         </p:nvSpPr>
         <p:spPr>
           <a:xfrm>
-            <a:off x="6457950" y="2764393"/>
-            <a:ext cx="2391609" cy="190500"/>
+            <a:off x="6457950" y="3129438"/>
+            <a:ext cx="2433638" cy="373023"/>
           </a:xfrm>
           <a:prstGeom prst="rect">
             <a:avLst/>
@@ -8993,7 +8993,7 @@
         </p:nvSpPr>
         <p:spPr>
           <a:xfrm>
-            <a:off x="6296025" y="3110746"/>
+            <a:off x="6296025" y="3658313"/>
             <a:ext cx="47625" cy="47625"/>
           </a:xfrm>
           <a:prstGeom prst="rect">
@@ -9020,8 +9020,8 @@
         </p:nvSpPr>
         <p:spPr>
           <a:xfrm>
-            <a:off x="6457950" y="3051691"/>
-            <a:ext cx="2433638" cy="190500"/>
+            <a:off x="6457950" y="3599258"/>
+            <a:ext cx="2433638" cy="373023"/>
           </a:xfrm>
           <a:prstGeom prst="rect">
             <a:avLst/>
@@ -9064,7 +9064,7 @@
         </p:nvSpPr>
         <p:spPr>
           <a:xfrm>
-            <a:off x="6296025" y="3398044"/>
+            <a:off x="6296025" y="4128133"/>
             <a:ext cx="47625" cy="47625"/>
           </a:xfrm>
           <a:prstGeom prst="rect">
@@ -9091,8 +9091,8 @@
         </p:nvSpPr>
         <p:spPr>
           <a:xfrm>
-            <a:off x="6457950" y="3338989"/>
-            <a:ext cx="2414468" cy="190500"/>
+            <a:off x="6457950" y="4069078"/>
+            <a:ext cx="2433638" cy="373023"/>
           </a:xfrm>
           <a:prstGeom prst="rect">
             <a:avLst/>
@@ -9234,7 +9234,7 @@
         <p:spPr>
           <a:xfrm>
             <a:off x="9391650" y="2189798"/>
-            <a:ext cx="2318742" cy="190500"/>
+            <a:ext cx="2389227" cy="373023"/>
           </a:xfrm>
           <a:prstGeom prst="rect">
             <a:avLst/>
@@ -9277,7 +9277,7 @@
         </p:nvSpPr>
         <p:spPr>
           <a:xfrm>
-            <a:off x="9229725" y="2536150"/>
+            <a:off x="9229725" y="2718673"/>
             <a:ext cx="47625" cy="47625"/>
           </a:xfrm>
           <a:prstGeom prst="rect">
@@ -9304,8 +9304,8 @@
         </p:nvSpPr>
         <p:spPr>
           <a:xfrm>
-            <a:off x="9391650" y="2477095"/>
-            <a:ext cx="2389227" cy="555546"/>
+            <a:off x="9391650" y="2659618"/>
+            <a:ext cx="2389227" cy="373023"/>
           </a:xfrm>
           <a:prstGeom prst="rect">
             <a:avLst/>
@@ -9425,6 +9425,432 @@
               <a:t>07</a:t>
             </a:r>
             <a:endParaRPr lang="en-US" sz="825" dirty="0"/>
+          </a:p>
+        </p:txBody>
+      </p:sp>
+      <p:sp>
+        <p:nvSpPr>
+          <p:cNvPr id="50" name="Text 26"/>
+          <p:cNvSpPr/>
+          <p:nvPr/>
+        </p:nvSpPr>
+        <p:spPr>
+          <a:xfrm>
+            <a:off x="3524250" y="4538898"/>
+            <a:ext cx="2561154" cy="373023"/>
+          </a:xfrm>
+          <a:prstGeom prst="rect">
+            <a:avLst/>
+          </a:prstGeom>
+          <a:noFill/>
+          <a:ln/>
+        </p:spPr>
+        <p:txBody>
+          <a:bodyPr wrap="square" lIns="0" tIns="0" rIns="0" bIns="0" rtlCol="0" anchor="t">
+            <a:normAutofit/>
+          </a:bodyPr>
+          <a:lstStyle/>
+          <a:p>
+            <a:pPr marL="0" indent="0" algn="l">
+              <a:lnSpc>
+                <a:spcPct val="119813"/>
+              </a:lnSpc>
+              <a:buNone/>
+            </a:pPr>
+            <a:r>
+              <a:rPr lang="en-US" sz="1013" dirty="0">
+                <a:solidFill>
+                  <a:srgbClr val="141414"/>
+                </a:solidFill>
+                <a:latin typeface="Inter" pitchFamily="34" charset="0"/>
+                <a:ea typeface="Inter" pitchFamily="34" charset="-122"/>
+                <a:cs typeface="Inter" pitchFamily="34" charset="-120"/>
+              </a:rPr>
+              <a:t>{{key_request_apm_6}}</a:t>
+            </a:r>
+            <a:endParaRPr lang="en-US" sz="1013" dirty="0"/>
+          </a:p>
+        </p:txBody>
+      </p:sp>
+      <p:sp>
+        <p:nvSpPr>
+          <p:cNvPr id="51" name="Shape 25"/>
+          <p:cNvSpPr/>
+          <p:nvPr/>
+        </p:nvSpPr>
+        <p:spPr>
+          <a:xfrm>
+            <a:off x="3362325" y="4597953"/>
+            <a:ext cx="47625" cy="47625"/>
+          </a:xfrm>
+          <a:prstGeom prst="rect">
+            <a:avLst/>
+          </a:prstGeom>
+          <a:solidFill>
+            <a:srgbClr val="1450F5"/>
+          </a:solidFill>
+          <a:ln/>
+        </p:spPr>
+        <p:txBody>
+          <a:bodyPr/>
+          <a:lstStyle/>
+          <a:p>
+            <a:endParaRPr lang="en-US"/>
+          </a:p>
+        </p:txBody>
+      </p:sp>
+      <p:sp>
+        <p:nvSpPr>
+          <p:cNvPr id="52" name="Text 38"/>
+          <p:cNvSpPr/>
+          <p:nvPr/>
+        </p:nvSpPr>
+        <p:spPr>
+          <a:xfrm>
+            <a:off x="6457950" y="4538898"/>
+            <a:ext cx="2433638" cy="373023"/>
+          </a:xfrm>
+          <a:prstGeom prst="rect">
+            <a:avLst/>
+          </a:prstGeom>
+          <a:noFill/>
+          <a:ln/>
+        </p:spPr>
+        <p:txBody>
+          <a:bodyPr wrap="square" lIns="0" tIns="0" rIns="0" bIns="0" rtlCol="0" anchor="t">
+            <a:normAutofit/>
+          </a:bodyPr>
+          <a:lstStyle/>
+          <a:p>
+            <a:pPr marL="0" indent="0" algn="l">
+              <a:lnSpc>
+                <a:spcPct val="119813"/>
+              </a:lnSpc>
+              <a:buNone/>
+            </a:pPr>
+            <a:r>
+              <a:rPr lang="en-US" sz="1013" dirty="0">
+                <a:solidFill>
+                  <a:srgbClr val="141414"/>
+                </a:solidFill>
+                <a:latin typeface="Inter" pitchFamily="34" charset="0"/>
+                <a:ea typeface="Inter" pitchFamily="34" charset="-122"/>
+                <a:cs typeface="Inter" pitchFamily="34" charset="-120"/>
+              </a:rPr>
+              <a:t>{{key_request_ame_6}}</a:t>
+            </a:r>
+            <a:endParaRPr lang="en-US" sz="1013" dirty="0"/>
+          </a:p>
+        </p:txBody>
+      </p:sp>
+      <p:sp>
+        <p:nvSpPr>
+          <p:cNvPr id="53" name="Shape 37"/>
+          <p:cNvSpPr/>
+          <p:nvPr/>
+        </p:nvSpPr>
+        <p:spPr>
+          <a:xfrm>
+            <a:off x="6296025" y="4597953"/>
+            <a:ext cx="47625" cy="47625"/>
+          </a:xfrm>
+          <a:prstGeom prst="rect">
+            <a:avLst/>
+          </a:prstGeom>
+          <a:solidFill>
+            <a:srgbClr val="1450F5"/>
+          </a:solidFill>
+          <a:ln/>
+        </p:spPr>
+        <p:txBody>
+          <a:bodyPr/>
+          <a:lstStyle/>
+          <a:p>
+            <a:endParaRPr lang="en-US"/>
+          </a:p>
+        </p:txBody>
+      </p:sp>
+      <p:sp>
+        <p:nvSpPr>
+          <p:cNvPr id="54" name="Text 44"/>
+          <p:cNvSpPr/>
+          <p:nvPr/>
+        </p:nvSpPr>
+        <p:spPr>
+          <a:xfrm>
+            <a:off x="9391650" y="3129438"/>
+            <a:ext cx="2389227" cy="373023"/>
+          </a:xfrm>
+          <a:prstGeom prst="rect">
+            <a:avLst/>
+          </a:prstGeom>
+          <a:noFill/>
+          <a:ln/>
+        </p:spPr>
+        <p:txBody>
+          <a:bodyPr wrap="square" lIns="0" tIns="0" rIns="0" bIns="0" rtlCol="0" anchor="t">
+            <a:normAutofit/>
+          </a:bodyPr>
+          <a:lstStyle/>
+          <a:p>
+            <a:pPr marL="0" indent="0" algn="l">
+              <a:lnSpc>
+                <a:spcPct val="119813"/>
+              </a:lnSpc>
+              <a:buNone/>
+            </a:pPr>
+            <a:r>
+              <a:rPr lang="en-US" sz="1013" dirty="0">
+                <a:solidFill>
+                  <a:srgbClr val="141414"/>
+                </a:solidFill>
+                <a:latin typeface="Inter" pitchFamily="34" charset="0"/>
+                <a:ea typeface="Inter" pitchFamily="34" charset="-122"/>
+                <a:cs typeface="Inter" pitchFamily="34" charset="-120"/>
+              </a:rPr>
+              <a:t>{{key_request_global_3}}</a:t>
+            </a:r>
+            <a:endParaRPr lang="en-US" sz="1013" dirty="0"/>
+          </a:p>
+        </p:txBody>
+      </p:sp>
+      <p:sp>
+        <p:nvSpPr>
+          <p:cNvPr id="55" name="Shape 43"/>
+          <p:cNvSpPr/>
+          <p:nvPr/>
+        </p:nvSpPr>
+        <p:spPr>
+          <a:xfrm>
+            <a:off x="9229725" y="3188493"/>
+            <a:ext cx="47625" cy="47625"/>
+          </a:xfrm>
+          <a:prstGeom prst="rect">
+            <a:avLst/>
+          </a:prstGeom>
+          <a:solidFill>
+            <a:srgbClr val="1450F5"/>
+          </a:solidFill>
+          <a:ln/>
+        </p:spPr>
+        <p:txBody>
+          <a:bodyPr/>
+          <a:lstStyle/>
+          <a:p>
+            <a:endParaRPr lang="en-US"/>
+          </a:p>
+        </p:txBody>
+      </p:sp>
+      <p:sp>
+        <p:nvSpPr>
+          <p:cNvPr id="56" name="Text 44"/>
+          <p:cNvSpPr/>
+          <p:nvPr/>
+        </p:nvSpPr>
+        <p:spPr>
+          <a:xfrm>
+            <a:off x="9391650" y="3599258"/>
+            <a:ext cx="2389227" cy="373023"/>
+          </a:xfrm>
+          <a:prstGeom prst="rect">
+            <a:avLst/>
+          </a:prstGeom>
+          <a:noFill/>
+          <a:ln/>
+        </p:spPr>
+        <p:txBody>
+          <a:bodyPr wrap="square" lIns="0" tIns="0" rIns="0" bIns="0" rtlCol="0" anchor="t">
+            <a:normAutofit/>
+          </a:bodyPr>
+          <a:lstStyle/>
+          <a:p>
+            <a:pPr marL="0" indent="0" algn="l">
+              <a:lnSpc>
+                <a:spcPct val="119813"/>
+              </a:lnSpc>
+              <a:buNone/>
+            </a:pPr>
+            <a:r>
+              <a:rPr lang="en-US" sz="1013" dirty="0">
+                <a:solidFill>
+                  <a:srgbClr val="141414"/>
+                </a:solidFill>
+                <a:latin typeface="Inter" pitchFamily="34" charset="0"/>
+                <a:ea typeface="Inter" pitchFamily="34" charset="-122"/>
+                <a:cs typeface="Inter" pitchFamily="34" charset="-120"/>
+              </a:rPr>
+              <a:t>{{key_request_global_4}}</a:t>
+            </a:r>
+            <a:endParaRPr lang="en-US" sz="1013" dirty="0"/>
+          </a:p>
+        </p:txBody>
+      </p:sp>
+      <p:sp>
+        <p:nvSpPr>
+          <p:cNvPr id="57" name="Shape 43"/>
+          <p:cNvSpPr/>
+          <p:nvPr/>
+        </p:nvSpPr>
+        <p:spPr>
+          <a:xfrm>
+            <a:off x="9229725" y="3658313"/>
+            <a:ext cx="47625" cy="47625"/>
+          </a:xfrm>
+          <a:prstGeom prst="rect">
+            <a:avLst/>
+          </a:prstGeom>
+          <a:solidFill>
+            <a:srgbClr val="1450F5"/>
+          </a:solidFill>
+          <a:ln/>
+        </p:spPr>
+        <p:txBody>
+          <a:bodyPr/>
+          <a:lstStyle/>
+          <a:p>
+            <a:endParaRPr lang="en-US"/>
+          </a:p>
+        </p:txBody>
+      </p:sp>
+      <p:sp>
+        <p:nvSpPr>
+          <p:cNvPr id="58" name="Text 44"/>
+          <p:cNvSpPr/>
+          <p:nvPr/>
+        </p:nvSpPr>
+        <p:spPr>
+          <a:xfrm>
+            <a:off x="9391650" y="4069078"/>
+            <a:ext cx="2389227" cy="373023"/>
+          </a:xfrm>
+          <a:prstGeom prst="rect">
+            <a:avLst/>
+          </a:prstGeom>
+          <a:noFill/>
+          <a:ln/>
+        </p:spPr>
+        <p:txBody>
+          <a:bodyPr wrap="square" lIns="0" tIns="0" rIns="0" bIns="0" rtlCol="0" anchor="t">
+            <a:normAutofit/>
+          </a:bodyPr>
+          <a:lstStyle/>
+          <a:p>
+            <a:pPr marL="0" indent="0" algn="l">
+              <a:lnSpc>
+                <a:spcPct val="119813"/>
+              </a:lnSpc>
+              <a:buNone/>
+            </a:pPr>
+            <a:r>
+              <a:rPr lang="en-US" sz="1013" dirty="0">
+                <a:solidFill>
+                  <a:srgbClr val="141414"/>
+                </a:solidFill>
+                <a:latin typeface="Inter" pitchFamily="34" charset="0"/>
+                <a:ea typeface="Inter" pitchFamily="34" charset="-122"/>
+                <a:cs typeface="Inter" pitchFamily="34" charset="-120"/>
+              </a:rPr>
+              <a:t>{{key_request_global_5}}</a:t>
+            </a:r>
+            <a:endParaRPr lang="en-US" sz="1013" dirty="0"/>
+          </a:p>
+        </p:txBody>
+      </p:sp>
+      <p:sp>
+        <p:nvSpPr>
+          <p:cNvPr id="59" name="Shape 43"/>
+          <p:cNvSpPr/>
+          <p:nvPr/>
+        </p:nvSpPr>
+        <p:spPr>
+          <a:xfrm>
+            <a:off x="9229725" y="4128133"/>
+            <a:ext cx="47625" cy="47625"/>
+          </a:xfrm>
+          <a:prstGeom prst="rect">
+            <a:avLst/>
+          </a:prstGeom>
+          <a:solidFill>
+            <a:srgbClr val="1450F5"/>
+          </a:solidFill>
+          <a:ln/>
+        </p:spPr>
+        <p:txBody>
+          <a:bodyPr/>
+          <a:lstStyle/>
+          <a:p>
+            <a:endParaRPr lang="en-US"/>
+          </a:p>
+        </p:txBody>
+      </p:sp>
+      <p:sp>
+        <p:nvSpPr>
+          <p:cNvPr id="60" name="Text 44"/>
+          <p:cNvSpPr/>
+          <p:nvPr/>
+        </p:nvSpPr>
+        <p:spPr>
+          <a:xfrm>
+            <a:off x="9391650" y="4538898"/>
+            <a:ext cx="2389227" cy="373023"/>
+          </a:xfrm>
+          <a:prstGeom prst="rect">
+            <a:avLst/>
+          </a:prstGeom>
+          <a:noFill/>
+          <a:ln/>
+        </p:spPr>
+        <p:txBody>
+          <a:bodyPr wrap="square" lIns="0" tIns="0" rIns="0" bIns="0" rtlCol="0" anchor="t">
+            <a:normAutofit/>
+          </a:bodyPr>
+          <a:lstStyle/>
+          <a:p>
+            <a:pPr marL="0" indent="0" algn="l">
+              <a:lnSpc>
+                <a:spcPct val="119813"/>
+              </a:lnSpc>
+              <a:buNone/>
+            </a:pPr>
+            <a:r>
+              <a:rPr lang="en-US" sz="1013" dirty="0">
+                <a:solidFill>
+                  <a:srgbClr val="141414"/>
+                </a:solidFill>
+                <a:latin typeface="Inter" pitchFamily="34" charset="0"/>
+                <a:ea typeface="Inter" pitchFamily="34" charset="-122"/>
+                <a:cs typeface="Inter" pitchFamily="34" charset="-120"/>
+              </a:rPr>
+              <a:t>{{key_request_global_6}}</a:t>
+            </a:r>
+            <a:endParaRPr lang="en-US" sz="1013" dirty="0"/>
+          </a:p>
+        </p:txBody>
+      </p:sp>
+      <p:sp>
+        <p:nvSpPr>
+          <p:cNvPr id="61" name="Shape 43"/>
+          <p:cNvSpPr/>
+          <p:nvPr/>
+        </p:nvSpPr>
+        <p:spPr>
+          <a:xfrm>
+            <a:off x="9229725" y="4597953"/>
+            <a:ext cx="47625" cy="47625"/>
+          </a:xfrm>
+          <a:prstGeom prst="rect">
+            <a:avLst/>
+          </a:prstGeom>
+          <a:solidFill>
+            <a:srgbClr val="1450F5"/>
+          </a:solidFill>
+          <a:ln/>
+        </p:spPr>
+        <p:txBody>
+          <a:bodyPr/>
+          <a:lstStyle/>
+          <a:p>
+            <a:endParaRPr lang="en-US"/>
           </a:p>
         </p:txBody>
       </p:sp>
